--- a/policies/Policy_slide_template.pptx
+++ b/policies/Policy_slide_template.pptx
@@ -504,9 +504,8 @@
               <a:rPr lang="en-US" dirty="0"/>
               <a:t>Blank policy slide, same layout as the deck. Replace every grey placeholder.
 Flag: delete the grey box and drop in a flag image of the same size (1.05 x 0.79 inches), then put a thin light border around it.
-Icon: delete the circle and paste the icon of the main instrument from any slide of the deck, or leave the circle empty.
-Instrument: Financial incentives, Information &amp; nudges, Support &amp; training, Flexible positions, Flexible re-certification.
-Target: any combination of Switchers, Leavers and Retired.
+Instrument dots: the five circles at the foot are, in order, Financial incentives, Information &amp; nudges, Support &amp; training, Flexible positions and Flexible re-certification. Copy a lit dot from any slide of the deck over the ones this policy uses, and leave the others grey.
+Target groups: the grey line under the dots. Any combination of Switchers, Leavers and Retired.
 Scale: Large for a national policy, Medium for a state, region, province or canton, Small for a district, a city or a single institution. Colours: Large 1F4E46, Medium C8892B, Small B3542E.
 Fonts: Cambria for the title, Calibri for everything else. Text colours: 24313A and B3542E.</a:t>
             </a:r>
@@ -1031,111 +1030,6 @@
         </p:nvSpPr>
         <p:spPr>
           <a:xfrm>
-            <a:off x="8165592" y="384048"/>
-            <a:ext cx="3474720" cy="429768"/>
-          </a:xfrm>
-          <a:prstGeom prst="roundRect">
-            <a:avLst>
-              <a:gd name="adj" fmla="val 50000"/>
-            </a:avLst>
-          </a:prstGeom>
-          <a:solidFill>
-            <a:srgbClr val="EAF2EE"/>
-          </a:solidFill>
-          <a:ln w="12700">
-            <a:solidFill>
-              <a:srgbClr val="B3542E"/>
-            </a:solidFill>
-            <a:prstDash val="solid"/>
-          </a:ln>
-        </p:spPr>
-      </p:sp>
-      <p:sp>
-        <p:nvSpPr>
-          <p:cNvPr id="7" name="Text 5"/>
-          <p:cNvSpPr txBox="1"/>
-          <p:nvPr/>
-        </p:nvSpPr>
-        <p:spPr>
-          <a:xfrm>
-            <a:off x="8165592" y="384048"/>
-            <a:ext cx="3474720" cy="429768"/>
-          </a:xfrm>
-          <a:prstGeom prst="rect">
-            <a:avLst/>
-          </a:prstGeom>
-          <a:noFill/>
-          <a:ln/>
-        </p:spPr>
-        <p:txBody>
-          <a:bodyPr wrap="square" lIns="0" tIns="0" rIns="0" bIns="0" rtlCol="0" anchor="ctr"/>
-          <a:lstStyle/>
-          <a:p>
-            <a:pPr algn="ctr" indent="0" marL="0">
-              <a:buNone/>
-            </a:pPr>
-            <a:r>
-              <a:rPr lang="en-US" sz="1350" b="1" dirty="0">
-                <a:solidFill>
-                  <a:srgbClr val="B3542E"/>
-                </a:solidFill>
-                <a:latin typeface="Calibri" pitchFamily="34" charset="0"/>
-                <a:ea typeface="Calibri" pitchFamily="34" charset="-122"/>
-                <a:cs typeface="Calibri" pitchFamily="34" charset="-120"/>
-              </a:rPr>
-              <a:t>Main instrument</a:t>
-            </a:r>
-            <a:endParaRPr lang="en-US" sz="1350" dirty="0"/>
-          </a:p>
-        </p:txBody>
-      </p:sp>
-      <p:sp>
-        <p:nvSpPr>
-          <p:cNvPr id="8" name="Text 6"/>
-          <p:cNvSpPr txBox="1"/>
-          <p:nvPr/>
-        </p:nvSpPr>
-        <p:spPr>
-          <a:xfrm>
-            <a:off x="7251192" y="850392"/>
-            <a:ext cx="4389120" cy="274320"/>
-          </a:xfrm>
-          <a:prstGeom prst="rect">
-            <a:avLst/>
-          </a:prstGeom>
-          <a:noFill/>
-          <a:ln/>
-        </p:spPr>
-        <p:txBody>
-          <a:bodyPr wrap="square" lIns="0" tIns="0" rIns="0" bIns="0" rtlCol="0" anchor="t"/>
-          <a:lstStyle/>
-          <a:p>
-            <a:pPr algn="r" indent="0" marL="0">
-              <a:buNone/>
-            </a:pPr>
-            <a:r>
-              <a:rPr lang="en-US" sz="1100" dirty="0">
-                <a:solidFill>
-                  <a:srgbClr val="8C9B95"/>
-                </a:solidFill>
-                <a:latin typeface="Calibri" pitchFamily="34" charset="0"/>
-                <a:ea typeface="Calibri" pitchFamily="34" charset="-122"/>
-                <a:cs typeface="Calibri" pitchFamily="34" charset="-120"/>
-              </a:rPr>
-              <a:t>Target: Switchers / Leavers / Retired</a:t>
-            </a:r>
-            <a:endParaRPr lang="en-US" sz="1100" dirty="0"/>
-          </a:p>
-        </p:txBody>
-      </p:sp>
-      <p:sp>
-        <p:nvSpPr>
-          <p:cNvPr id="9" name="Shape 7"/>
-          <p:cNvSpPr/>
-          <p:nvPr/>
-        </p:nvSpPr>
-        <p:spPr>
-          <a:xfrm>
             <a:off x="457200" y="1371600"/>
             <a:ext cx="11274552" cy="3858768"/>
           </a:xfrm>
@@ -1157,78 +1051,14 @@
       </p:sp>
       <p:sp>
         <p:nvSpPr>
-          <p:cNvPr id="10" name="Shape 8"/>
-          <p:cNvSpPr/>
-          <p:nvPr/>
-        </p:nvSpPr>
-        <p:spPr>
-          <a:xfrm>
-            <a:off x="777240" y="1691640"/>
-            <a:ext cx="777240" cy="777240"/>
-          </a:xfrm>
-          <a:prstGeom prst="ellipse">
-            <a:avLst/>
-          </a:prstGeom>
-          <a:solidFill>
-            <a:srgbClr val="FFFFFF"/>
-          </a:solidFill>
-          <a:ln w="15875">
-            <a:solidFill>
-              <a:srgbClr val="1F4E46"/>
-            </a:solidFill>
-            <a:prstDash val="solid"/>
-          </a:ln>
-        </p:spPr>
-      </p:sp>
-      <p:sp>
-        <p:nvSpPr>
-          <p:cNvPr id="11" name="Text 9"/>
+          <p:cNvPr id="7" name="Text 5"/>
           <p:cNvSpPr txBox="1"/>
           <p:nvPr/>
         </p:nvSpPr>
         <p:spPr>
           <a:xfrm>
-            <a:off x="777240" y="1691640"/>
-            <a:ext cx="777240" cy="777240"/>
-          </a:xfrm>
-          <a:prstGeom prst="rect">
-            <a:avLst/>
-          </a:prstGeom>
-          <a:noFill/>
-          <a:ln/>
-        </p:spPr>
-        <p:txBody>
-          <a:bodyPr wrap="square" lIns="0" tIns="0" rIns="0" bIns="0" rtlCol="0" anchor="ctr"/>
-          <a:lstStyle/>
-          <a:p>
-            <a:pPr algn="ctr" indent="0" marL="0">
-              <a:buNone/>
-            </a:pPr>
-            <a:r>
-              <a:rPr lang="en-US" sz="900" dirty="0">
-                <a:solidFill>
-                  <a:srgbClr val="8C9B95"/>
-                </a:solidFill>
-                <a:latin typeface="Calibri" pitchFamily="34" charset="0"/>
-                <a:ea typeface="Calibri" pitchFamily="34" charset="-122"/>
-                <a:cs typeface="Calibri" pitchFamily="34" charset="-120"/>
-              </a:rPr>
-              <a:t>icon</a:t>
-            </a:r>
-            <a:endParaRPr lang="en-US" sz="900" dirty="0"/>
-          </a:p>
-        </p:txBody>
-      </p:sp>
-      <p:sp>
-        <p:nvSpPr>
-          <p:cNvPr id="12" name="Text 10"/>
-          <p:cNvSpPr txBox="1"/>
-          <p:nvPr/>
-        </p:nvSpPr>
-        <p:spPr>
-          <a:xfrm>
-            <a:off x="1783080" y="1536192"/>
-            <a:ext cx="9738360" cy="868680"/>
+            <a:off x="868680" y="1554480"/>
+            <a:ext cx="10451592" cy="822960"/>
           </a:xfrm>
           <a:prstGeom prst="rect">
             <a:avLst/>
@@ -1260,14 +1090,14 @@
       </p:sp>
       <p:sp>
         <p:nvSpPr>
-          <p:cNvPr id="13" name="Text 11"/>
+          <p:cNvPr id="8" name="Text 6"/>
           <p:cNvSpPr txBox="1"/>
           <p:nvPr/>
         </p:nvSpPr>
         <p:spPr>
           <a:xfrm>
-            <a:off x="1783080" y="2395728"/>
-            <a:ext cx="9738360" cy="2450592"/>
+            <a:off x="868680" y="2414016"/>
+            <a:ext cx="10451592" cy="2606040"/>
           </a:xfrm>
           <a:prstGeom prst="rect">
             <a:avLst/>
@@ -1302,67 +1132,14 @@
       </p:sp>
       <p:sp>
         <p:nvSpPr>
-          <p:cNvPr id="14" name="Text 12"/>
+          <p:cNvPr id="9" name="Text 7"/>
           <p:cNvSpPr txBox="1"/>
           <p:nvPr/>
         </p:nvSpPr>
         <p:spPr>
           <a:xfrm>
-            <a:off x="1783080" y="4864608"/>
-            <a:ext cx="9738360" cy="274320"/>
-          </a:xfrm>
-          <a:prstGeom prst="rect">
-            <a:avLst/>
-          </a:prstGeom>
-          <a:noFill/>
-          <a:ln/>
-        </p:spPr>
-        <p:txBody>
-          <a:bodyPr wrap="square" lIns="0" tIns="0" rIns="0" bIns="0" rtlCol="0" anchor="ctr"/>
-          <a:lstStyle/>
-          <a:p>
-            <a:pPr indent="0" marL="0">
-              <a:buNone/>
-            </a:pPr>
-            <a:r>
-              <a:rPr lang="en-US" sz="1150" b="1" dirty="0">
-                <a:solidFill>
-                  <a:srgbClr val="24313A"/>
-                </a:solidFill>
-                <a:latin typeface="Calibri" pitchFamily="34" charset="0"/>
-                <a:ea typeface="Calibri" pitchFamily="34" charset="-122"/>
-                <a:cs typeface="Calibri" pitchFamily="34" charset="-120"/>
-              </a:rPr>
-              <a:t>Secondary instruments: </a:t>
-            </a:r>
-            <a:pPr indent="0" marL="0">
-              <a:buNone/>
-            </a:pPr>
-            <a:r>
-              <a:rPr lang="en-US" sz="1150" dirty="0">
-                <a:solidFill>
-                  <a:srgbClr val="8C9B95"/>
-                </a:solidFill>
-                <a:latin typeface="Calibri" pitchFamily="34" charset="0"/>
-                <a:ea typeface="Calibri" pitchFamily="34" charset="-122"/>
-                <a:cs typeface="Calibri" pitchFamily="34" charset="-120"/>
-              </a:rPr>
-              <a:t>list them with commas, or write none</a:t>
-            </a:r>
-            <a:endParaRPr lang="en-US" sz="1150" dirty="0"/>
-          </a:p>
-        </p:txBody>
-      </p:sp>
-      <p:sp>
-        <p:nvSpPr>
-          <p:cNvPr id="15" name="Text 13"/>
-          <p:cNvSpPr txBox="1"/>
-          <p:nvPr/>
-        </p:nvSpPr>
-        <p:spPr>
-          <a:xfrm>
-            <a:off x="457200" y="5413248"/>
-            <a:ext cx="9692640" cy="868680"/>
+            <a:off x="457200" y="5303520"/>
+            <a:ext cx="11274552" cy="566928"/>
           </a:xfrm>
           <a:prstGeom prst="rect">
             <a:avLst/>
@@ -1408,7 +1185,366 @@
       </p:sp>
       <p:sp>
         <p:nvSpPr>
+          <p:cNvPr id="10" name="Shape 8"/>
+          <p:cNvSpPr/>
+          <p:nvPr/>
+        </p:nvSpPr>
+        <p:spPr>
+          <a:xfrm>
+            <a:off x="502920" y="5961888"/>
+            <a:ext cx="384048" cy="384048"/>
+          </a:xfrm>
+          <a:prstGeom prst="ellipse">
+            <a:avLst/>
+          </a:prstGeom>
+          <a:solidFill>
+            <a:srgbClr val="DCE6E0"/>
+          </a:solidFill>
+          <a:ln w="12700">
+            <a:solidFill>
+              <a:srgbClr val="DCE6E0"/>
+            </a:solidFill>
+            <a:prstDash val="solid"/>
+          </a:ln>
+        </p:spPr>
+      </p:sp>
+      <p:sp>
+        <p:nvSpPr>
+          <p:cNvPr id="11" name="Text 9"/>
+          <p:cNvSpPr txBox="1"/>
+          <p:nvPr/>
+        </p:nvSpPr>
+        <p:spPr>
+          <a:xfrm>
+            <a:off x="502920" y="5961888"/>
+            <a:ext cx="384048" cy="384048"/>
+          </a:xfrm>
+          <a:prstGeom prst="rect">
+            <a:avLst/>
+          </a:prstGeom>
+          <a:noFill/>
+          <a:ln/>
+        </p:spPr>
+        <p:txBody>
+          <a:bodyPr wrap="square" lIns="0" tIns="0" rIns="0" bIns="0" rtlCol="0" anchor="ctr"/>
+          <a:lstStyle/>
+          <a:p>
+            <a:pPr algn="ctr" indent="0" marL="0">
+              <a:buNone/>
+            </a:pPr>
+            <a:r>
+              <a:rPr lang="en-US" sz="900" dirty="0">
+                <a:solidFill>
+                  <a:srgbClr val="8C9B95"/>
+                </a:solidFill>
+                <a:latin typeface="Calibri" pitchFamily="34" charset="0"/>
+                <a:ea typeface="Calibri" pitchFamily="34" charset="-122"/>
+                <a:cs typeface="Calibri" pitchFamily="34" charset="-120"/>
+              </a:rPr>
+              <a:t>1</a:t>
+            </a:r>
+            <a:endParaRPr lang="en-US" sz="900" dirty="0"/>
+          </a:p>
+        </p:txBody>
+      </p:sp>
+      <p:sp>
+        <p:nvSpPr>
+          <p:cNvPr id="12" name="Shape 10"/>
+          <p:cNvSpPr/>
+          <p:nvPr/>
+        </p:nvSpPr>
+        <p:spPr>
+          <a:xfrm>
+            <a:off x="1042416" y="5961888"/>
+            <a:ext cx="384048" cy="384048"/>
+          </a:xfrm>
+          <a:prstGeom prst="ellipse">
+            <a:avLst/>
+          </a:prstGeom>
+          <a:solidFill>
+            <a:srgbClr val="DCE6E0"/>
+          </a:solidFill>
+          <a:ln w="12700">
+            <a:solidFill>
+              <a:srgbClr val="DCE6E0"/>
+            </a:solidFill>
+            <a:prstDash val="solid"/>
+          </a:ln>
+        </p:spPr>
+      </p:sp>
+      <p:sp>
+        <p:nvSpPr>
+          <p:cNvPr id="13" name="Text 11"/>
+          <p:cNvSpPr txBox="1"/>
+          <p:nvPr/>
+        </p:nvSpPr>
+        <p:spPr>
+          <a:xfrm>
+            <a:off x="1042416" y="5961888"/>
+            <a:ext cx="384048" cy="384048"/>
+          </a:xfrm>
+          <a:prstGeom prst="rect">
+            <a:avLst/>
+          </a:prstGeom>
+          <a:noFill/>
+          <a:ln/>
+        </p:spPr>
+        <p:txBody>
+          <a:bodyPr wrap="square" lIns="0" tIns="0" rIns="0" bIns="0" rtlCol="0" anchor="ctr"/>
+          <a:lstStyle/>
+          <a:p>
+            <a:pPr algn="ctr" indent="0" marL="0">
+              <a:buNone/>
+            </a:pPr>
+            <a:r>
+              <a:rPr lang="en-US" sz="900" dirty="0">
+                <a:solidFill>
+                  <a:srgbClr val="8C9B95"/>
+                </a:solidFill>
+                <a:latin typeface="Calibri" pitchFamily="34" charset="0"/>
+                <a:ea typeface="Calibri" pitchFamily="34" charset="-122"/>
+                <a:cs typeface="Calibri" pitchFamily="34" charset="-120"/>
+              </a:rPr>
+              <a:t>2</a:t>
+            </a:r>
+            <a:endParaRPr lang="en-US" sz="900" dirty="0"/>
+          </a:p>
+        </p:txBody>
+      </p:sp>
+      <p:sp>
+        <p:nvSpPr>
+          <p:cNvPr id="14" name="Shape 12"/>
+          <p:cNvSpPr/>
+          <p:nvPr/>
+        </p:nvSpPr>
+        <p:spPr>
+          <a:xfrm>
+            <a:off x="1581912" y="5961888"/>
+            <a:ext cx="384048" cy="384048"/>
+          </a:xfrm>
+          <a:prstGeom prst="ellipse">
+            <a:avLst/>
+          </a:prstGeom>
+          <a:solidFill>
+            <a:srgbClr val="DCE6E0"/>
+          </a:solidFill>
+          <a:ln w="12700">
+            <a:solidFill>
+              <a:srgbClr val="DCE6E0"/>
+            </a:solidFill>
+            <a:prstDash val="solid"/>
+          </a:ln>
+        </p:spPr>
+      </p:sp>
+      <p:sp>
+        <p:nvSpPr>
+          <p:cNvPr id="15" name="Text 13"/>
+          <p:cNvSpPr txBox="1"/>
+          <p:nvPr/>
+        </p:nvSpPr>
+        <p:spPr>
+          <a:xfrm>
+            <a:off x="1581912" y="5961888"/>
+            <a:ext cx="384048" cy="384048"/>
+          </a:xfrm>
+          <a:prstGeom prst="rect">
+            <a:avLst/>
+          </a:prstGeom>
+          <a:noFill/>
+          <a:ln/>
+        </p:spPr>
+        <p:txBody>
+          <a:bodyPr wrap="square" lIns="0" tIns="0" rIns="0" bIns="0" rtlCol="0" anchor="ctr"/>
+          <a:lstStyle/>
+          <a:p>
+            <a:pPr algn="ctr" indent="0" marL="0">
+              <a:buNone/>
+            </a:pPr>
+            <a:r>
+              <a:rPr lang="en-US" sz="900" dirty="0">
+                <a:solidFill>
+                  <a:srgbClr val="8C9B95"/>
+                </a:solidFill>
+                <a:latin typeface="Calibri" pitchFamily="34" charset="0"/>
+                <a:ea typeface="Calibri" pitchFamily="34" charset="-122"/>
+                <a:cs typeface="Calibri" pitchFamily="34" charset="-120"/>
+              </a:rPr>
+              <a:t>3</a:t>
+            </a:r>
+            <a:endParaRPr lang="en-US" sz="900" dirty="0"/>
+          </a:p>
+        </p:txBody>
+      </p:sp>
+      <p:sp>
+        <p:nvSpPr>
           <p:cNvPr id="16" name="Shape 14"/>
+          <p:cNvSpPr/>
+          <p:nvPr/>
+        </p:nvSpPr>
+        <p:spPr>
+          <a:xfrm>
+            <a:off x="2121408" y="5961888"/>
+            <a:ext cx="384048" cy="384048"/>
+          </a:xfrm>
+          <a:prstGeom prst="ellipse">
+            <a:avLst/>
+          </a:prstGeom>
+          <a:solidFill>
+            <a:srgbClr val="DCE6E0"/>
+          </a:solidFill>
+          <a:ln w="12700">
+            <a:solidFill>
+              <a:srgbClr val="DCE6E0"/>
+            </a:solidFill>
+            <a:prstDash val="solid"/>
+          </a:ln>
+        </p:spPr>
+      </p:sp>
+      <p:sp>
+        <p:nvSpPr>
+          <p:cNvPr id="17" name="Text 15"/>
+          <p:cNvSpPr txBox="1"/>
+          <p:nvPr/>
+        </p:nvSpPr>
+        <p:spPr>
+          <a:xfrm>
+            <a:off x="2121408" y="5961888"/>
+            <a:ext cx="384048" cy="384048"/>
+          </a:xfrm>
+          <a:prstGeom prst="rect">
+            <a:avLst/>
+          </a:prstGeom>
+          <a:noFill/>
+          <a:ln/>
+        </p:spPr>
+        <p:txBody>
+          <a:bodyPr wrap="square" lIns="0" tIns="0" rIns="0" bIns="0" rtlCol="0" anchor="ctr"/>
+          <a:lstStyle/>
+          <a:p>
+            <a:pPr algn="ctr" indent="0" marL="0">
+              <a:buNone/>
+            </a:pPr>
+            <a:r>
+              <a:rPr lang="en-US" sz="900" dirty="0">
+                <a:solidFill>
+                  <a:srgbClr val="8C9B95"/>
+                </a:solidFill>
+                <a:latin typeface="Calibri" pitchFamily="34" charset="0"/>
+                <a:ea typeface="Calibri" pitchFamily="34" charset="-122"/>
+                <a:cs typeface="Calibri" pitchFamily="34" charset="-120"/>
+              </a:rPr>
+              <a:t>4</a:t>
+            </a:r>
+            <a:endParaRPr lang="en-US" sz="900" dirty="0"/>
+          </a:p>
+        </p:txBody>
+      </p:sp>
+      <p:sp>
+        <p:nvSpPr>
+          <p:cNvPr id="18" name="Shape 16"/>
+          <p:cNvSpPr/>
+          <p:nvPr/>
+        </p:nvSpPr>
+        <p:spPr>
+          <a:xfrm>
+            <a:off x="2660904" y="5961888"/>
+            <a:ext cx="384048" cy="384048"/>
+          </a:xfrm>
+          <a:prstGeom prst="ellipse">
+            <a:avLst/>
+          </a:prstGeom>
+          <a:solidFill>
+            <a:srgbClr val="DCE6E0"/>
+          </a:solidFill>
+          <a:ln w="12700">
+            <a:solidFill>
+              <a:srgbClr val="DCE6E0"/>
+            </a:solidFill>
+            <a:prstDash val="solid"/>
+          </a:ln>
+        </p:spPr>
+      </p:sp>
+      <p:sp>
+        <p:nvSpPr>
+          <p:cNvPr id="19" name="Text 17"/>
+          <p:cNvSpPr txBox="1"/>
+          <p:nvPr/>
+        </p:nvSpPr>
+        <p:spPr>
+          <a:xfrm>
+            <a:off x="2660904" y="5961888"/>
+            <a:ext cx="384048" cy="384048"/>
+          </a:xfrm>
+          <a:prstGeom prst="rect">
+            <a:avLst/>
+          </a:prstGeom>
+          <a:noFill/>
+          <a:ln/>
+        </p:spPr>
+        <p:txBody>
+          <a:bodyPr wrap="square" lIns="0" tIns="0" rIns="0" bIns="0" rtlCol="0" anchor="ctr"/>
+          <a:lstStyle/>
+          <a:p>
+            <a:pPr algn="ctr" indent="0" marL="0">
+              <a:buNone/>
+            </a:pPr>
+            <a:r>
+              <a:rPr lang="en-US" sz="900" dirty="0">
+                <a:solidFill>
+                  <a:srgbClr val="8C9B95"/>
+                </a:solidFill>
+                <a:latin typeface="Calibri" pitchFamily="34" charset="0"/>
+                <a:ea typeface="Calibri" pitchFamily="34" charset="-122"/>
+                <a:cs typeface="Calibri" pitchFamily="34" charset="-120"/>
+              </a:rPr>
+              <a:t>5</a:t>
+            </a:r>
+            <a:endParaRPr lang="en-US" sz="900" dirty="0"/>
+          </a:p>
+        </p:txBody>
+      </p:sp>
+      <p:sp>
+        <p:nvSpPr>
+          <p:cNvPr id="20" name="Text 18"/>
+          <p:cNvSpPr txBox="1"/>
+          <p:nvPr/>
+        </p:nvSpPr>
+        <p:spPr>
+          <a:xfrm>
+            <a:off x="502920" y="6419088"/>
+            <a:ext cx="4572000" cy="256032"/>
+          </a:xfrm>
+          <a:prstGeom prst="rect">
+            <a:avLst/>
+          </a:prstGeom>
+          <a:noFill/>
+          <a:ln/>
+        </p:spPr>
+        <p:txBody>
+          <a:bodyPr wrap="square" lIns="0" tIns="0" rIns="0" bIns="0" rtlCol="0" anchor="ctr"/>
+          <a:lstStyle/>
+          <a:p>
+            <a:pPr indent="0" marL="0">
+              <a:buNone/>
+            </a:pPr>
+            <a:r>
+              <a:rPr lang="en-US" sz="1050" dirty="0">
+                <a:solidFill>
+                  <a:srgbClr val="8C9B95"/>
+                </a:solidFill>
+                <a:latin typeface="Calibri" pitchFamily="34" charset="0"/>
+                <a:ea typeface="Calibri" pitchFamily="34" charset="-122"/>
+                <a:cs typeface="Calibri" pitchFamily="34" charset="-120"/>
+              </a:rPr>
+              <a:t>Switchers / Leavers / Retired</a:t>
+            </a:r>
+            <a:endParaRPr lang="en-US" sz="1050" dirty="0"/>
+          </a:p>
+        </p:txBody>
+      </p:sp>
+      <p:sp>
+        <p:nvSpPr>
+          <p:cNvPr id="21" name="Shape 19"/>
           <p:cNvSpPr/>
           <p:nvPr/>
         </p:nvSpPr>
@@ -1435,7 +1571,7 @@
       </p:sp>
       <p:sp>
         <p:nvSpPr>
-          <p:cNvPr id="17" name="Text 15"/>
+          <p:cNvPr id="22" name="Text 20"/>
           <p:cNvSpPr txBox="1"/>
           <p:nvPr/>
         </p:nvSpPr>
@@ -1474,7 +1610,7 @@
       </p:sp>
       <p:sp>
         <p:nvSpPr>
-          <p:cNvPr id="18" name="Text 16"/>
+          <p:cNvPr id="23" name="Text 21"/>
           <p:cNvSpPr txBox="1"/>
           <p:nvPr/>
         </p:nvSpPr>

--- a/policies/Policy_slide_template.pptx
+++ b/policies/Policy_slide_template.pptx
@@ -952,8 +952,8 @@
         </p:nvSpPr>
         <p:spPr>
           <a:xfrm>
-            <a:off x="1600200" y="329184"/>
-            <a:ext cx="6217920" cy="457200"/>
+            <a:off x="1600200" y="384048"/>
+            <a:ext cx="8321040" cy="457200"/>
           </a:xfrm>
           <a:prstGeom prst="rect">
             <a:avLst/>
@@ -991,8 +991,8 @@
         </p:nvSpPr>
         <p:spPr>
           <a:xfrm>
-            <a:off x="1600200" y="786384"/>
-            <a:ext cx="6217920" cy="310896"/>
+            <a:off x="1600200" y="841248"/>
+            <a:ext cx="8321040" cy="310896"/>
           </a:xfrm>
           <a:prstGeom prst="rect">
             <a:avLst/>
@@ -1139,7 +1139,7 @@
         <p:spPr>
           <a:xfrm>
             <a:off x="457200" y="5303520"/>
-            <a:ext cx="11274552" cy="566928"/>
+            <a:ext cx="8138160" cy="822960"/>
           </a:xfrm>
           <a:prstGeom prst="rect">
             <a:avLst/>
@@ -1191,8 +1191,8 @@
         </p:nvSpPr>
         <p:spPr>
           <a:xfrm>
-            <a:off x="502920" y="5961888"/>
-            <a:ext cx="384048" cy="384048"/>
+            <a:off x="8695944" y="5815584"/>
+            <a:ext cx="475488" cy="475488"/>
           </a:xfrm>
           <a:prstGeom prst="ellipse">
             <a:avLst/>
@@ -1216,8 +1216,8 @@
         </p:nvSpPr>
         <p:spPr>
           <a:xfrm>
-            <a:off x="502920" y="5961888"/>
-            <a:ext cx="384048" cy="384048"/>
+            <a:off x="8695944" y="5815584"/>
+            <a:ext cx="475488" cy="475488"/>
           </a:xfrm>
           <a:prstGeom prst="rect">
             <a:avLst/>
@@ -1233,7 +1233,7 @@
               <a:buNone/>
             </a:pPr>
             <a:r>
-              <a:rPr lang="en-US" sz="900" dirty="0">
+              <a:rPr lang="en-US" sz="1000" dirty="0">
                 <a:solidFill>
                   <a:srgbClr val="8C9B95"/>
                 </a:solidFill>
@@ -1243,7 +1243,7 @@
               </a:rPr>
               <a:t>1</a:t>
             </a:r>
-            <a:endParaRPr lang="en-US" sz="900" dirty="0"/>
+            <a:endParaRPr lang="en-US" sz="1000" dirty="0"/>
           </a:p>
         </p:txBody>
       </p:sp>
@@ -1255,8 +1255,8 @@
         </p:nvSpPr>
         <p:spPr>
           <a:xfrm>
-            <a:off x="1042416" y="5961888"/>
-            <a:ext cx="384048" cy="384048"/>
+            <a:off x="9336024" y="5815584"/>
+            <a:ext cx="475488" cy="475488"/>
           </a:xfrm>
           <a:prstGeom prst="ellipse">
             <a:avLst/>
@@ -1280,8 +1280,8 @@
         </p:nvSpPr>
         <p:spPr>
           <a:xfrm>
-            <a:off x="1042416" y="5961888"/>
-            <a:ext cx="384048" cy="384048"/>
+            <a:off x="9336024" y="5815584"/>
+            <a:ext cx="475488" cy="475488"/>
           </a:xfrm>
           <a:prstGeom prst="rect">
             <a:avLst/>
@@ -1297,7 +1297,7 @@
               <a:buNone/>
             </a:pPr>
             <a:r>
-              <a:rPr lang="en-US" sz="900" dirty="0">
+              <a:rPr lang="en-US" sz="1000" dirty="0">
                 <a:solidFill>
                   <a:srgbClr val="8C9B95"/>
                 </a:solidFill>
@@ -1307,7 +1307,7 @@
               </a:rPr>
               <a:t>2</a:t>
             </a:r>
-            <a:endParaRPr lang="en-US" sz="900" dirty="0"/>
+            <a:endParaRPr lang="en-US" sz="1000" dirty="0"/>
           </a:p>
         </p:txBody>
       </p:sp>
@@ -1319,8 +1319,8 @@
         </p:nvSpPr>
         <p:spPr>
           <a:xfrm>
-            <a:off x="1581912" y="5961888"/>
-            <a:ext cx="384048" cy="384048"/>
+            <a:off x="9976104" y="5815584"/>
+            <a:ext cx="475488" cy="475488"/>
           </a:xfrm>
           <a:prstGeom prst="ellipse">
             <a:avLst/>
@@ -1344,8 +1344,8 @@
         </p:nvSpPr>
         <p:spPr>
           <a:xfrm>
-            <a:off x="1581912" y="5961888"/>
-            <a:ext cx="384048" cy="384048"/>
+            <a:off x="9976104" y="5815584"/>
+            <a:ext cx="475488" cy="475488"/>
           </a:xfrm>
           <a:prstGeom prst="rect">
             <a:avLst/>
@@ -1361,7 +1361,7 @@
               <a:buNone/>
             </a:pPr>
             <a:r>
-              <a:rPr lang="en-US" sz="900" dirty="0">
+              <a:rPr lang="en-US" sz="1000" dirty="0">
                 <a:solidFill>
                   <a:srgbClr val="8C9B95"/>
                 </a:solidFill>
@@ -1371,7 +1371,7 @@
               </a:rPr>
               <a:t>3</a:t>
             </a:r>
-            <a:endParaRPr lang="en-US" sz="900" dirty="0"/>
+            <a:endParaRPr lang="en-US" sz="1000" dirty="0"/>
           </a:p>
         </p:txBody>
       </p:sp>
@@ -1383,8 +1383,8 @@
         </p:nvSpPr>
         <p:spPr>
           <a:xfrm>
-            <a:off x="2121408" y="5961888"/>
-            <a:ext cx="384048" cy="384048"/>
+            <a:off x="10616184" y="5815584"/>
+            <a:ext cx="475488" cy="475488"/>
           </a:xfrm>
           <a:prstGeom prst="ellipse">
             <a:avLst/>
@@ -1408,8 +1408,8 @@
         </p:nvSpPr>
         <p:spPr>
           <a:xfrm>
-            <a:off x="2121408" y="5961888"/>
-            <a:ext cx="384048" cy="384048"/>
+            <a:off x="10616184" y="5815584"/>
+            <a:ext cx="475488" cy="475488"/>
           </a:xfrm>
           <a:prstGeom prst="rect">
             <a:avLst/>
@@ -1425,7 +1425,7 @@
               <a:buNone/>
             </a:pPr>
             <a:r>
-              <a:rPr lang="en-US" sz="900" dirty="0">
+              <a:rPr lang="en-US" sz="1000" dirty="0">
                 <a:solidFill>
                   <a:srgbClr val="8C9B95"/>
                 </a:solidFill>
@@ -1435,7 +1435,7 @@
               </a:rPr>
               <a:t>4</a:t>
             </a:r>
-            <a:endParaRPr lang="en-US" sz="900" dirty="0"/>
+            <a:endParaRPr lang="en-US" sz="1000" dirty="0"/>
           </a:p>
         </p:txBody>
       </p:sp>
@@ -1447,8 +1447,8 @@
         </p:nvSpPr>
         <p:spPr>
           <a:xfrm>
-            <a:off x="2660904" y="5961888"/>
-            <a:ext cx="384048" cy="384048"/>
+            <a:off x="11256264" y="5815584"/>
+            <a:ext cx="475488" cy="475488"/>
           </a:xfrm>
           <a:prstGeom prst="ellipse">
             <a:avLst/>
@@ -1472,8 +1472,8 @@
         </p:nvSpPr>
         <p:spPr>
           <a:xfrm>
-            <a:off x="2660904" y="5961888"/>
-            <a:ext cx="384048" cy="384048"/>
+            <a:off x="11256264" y="5815584"/>
+            <a:ext cx="475488" cy="475488"/>
           </a:xfrm>
           <a:prstGeom prst="rect">
             <a:avLst/>
@@ -1489,7 +1489,7 @@
               <a:buNone/>
             </a:pPr>
             <a:r>
-              <a:rPr lang="en-US" sz="900" dirty="0">
+              <a:rPr lang="en-US" sz="1000" dirty="0">
                 <a:solidFill>
                   <a:srgbClr val="8C9B95"/>
                 </a:solidFill>
@@ -1499,7 +1499,7 @@
               </a:rPr>
               <a:t>5</a:t>
             </a:r>
-            <a:endParaRPr lang="en-US" sz="900" dirty="0"/>
+            <a:endParaRPr lang="en-US" sz="1000" dirty="0"/>
           </a:p>
         </p:txBody>
       </p:sp>
@@ -1511,8 +1511,8 @@
         </p:nvSpPr>
         <p:spPr>
           <a:xfrm>
-            <a:off x="502920" y="6419088"/>
-            <a:ext cx="4572000" cy="256032"/>
+            <a:off x="7132320" y="6355080"/>
+            <a:ext cx="4599432" cy="256032"/>
           </a:xfrm>
           <a:prstGeom prst="rect">
             <a:avLst/>
@@ -1524,7 +1524,7 @@
           <a:bodyPr wrap="square" lIns="0" tIns="0" rIns="0" bIns="0" rtlCol="0" anchor="ctr"/>
           <a:lstStyle/>
           <a:p>
-            <a:pPr indent="0" marL="0">
+            <a:pPr algn="r" indent="0" marL="0">
               <a:buNone/>
             </a:pPr>
             <a:r>
@@ -1550,8 +1550,8 @@
         </p:nvSpPr>
         <p:spPr>
           <a:xfrm>
-            <a:off x="10451592" y="5943600"/>
-            <a:ext cx="1280160" cy="365760"/>
+            <a:off x="10085832" y="384048"/>
+            <a:ext cx="1645920" cy="429768"/>
           </a:xfrm>
           <a:prstGeom prst="roundRect">
             <a:avLst>
@@ -1577,8 +1577,8 @@
         </p:nvSpPr>
         <p:spPr>
           <a:xfrm>
-            <a:off x="10451592" y="5943600"/>
-            <a:ext cx="1280160" cy="365760"/>
+            <a:off x="10085832" y="384048"/>
+            <a:ext cx="1645920" cy="429768"/>
           </a:xfrm>
           <a:prstGeom prst="rect">
             <a:avLst/>
@@ -1594,7 +1594,7 @@
               <a:buNone/>
             </a:pPr>
             <a:r>
-              <a:rPr lang="en-US" sz="1250" b="1" dirty="0">
+              <a:rPr lang="en-US" sz="1400" b="1" dirty="0">
                 <a:solidFill>
                   <a:srgbClr val="FFFFFF"/>
                 </a:solidFill>
@@ -1604,7 +1604,7 @@
               </a:rPr>
               <a:t>Scale</a:t>
             </a:r>
-            <a:endParaRPr lang="en-US" sz="1250" dirty="0"/>
+            <a:endParaRPr lang="en-US" sz="1400" dirty="0"/>
           </a:p>
         </p:txBody>
       </p:sp>
@@ -1616,7 +1616,7 @@
         </p:nvSpPr>
         <p:spPr>
           <a:xfrm>
-            <a:off x="11185855" y="6473952"/>
+            <a:off x="457200" y="6473952"/>
             <a:ext cx="548640" cy="274320"/>
           </a:xfrm>
           <a:prstGeom prst="rect">
@@ -1629,7 +1629,7 @@
           <a:bodyPr wrap="square" lIns="0" tIns="0" rIns="0" bIns="0" rtlCol="0" anchor="ctr"/>
           <a:lstStyle/>
           <a:p>
-            <a:pPr algn="r" indent="0" marL="0">
+            <a:pPr algn="l" indent="0" marL="0">
               <a:buNone/>
             </a:pPr>
             <a:r>
